--- a/temp/AI_Defense_Architecture_Option_B_EN.pptx
+++ b/temp/AI_Defense_Architecture_Option_B_EN.pptx
@@ -3652,7 +3652,7 @@
         <p:spPr>
           <a:xfrm>
             <a:off x="457200" y="6473952"/>
-            <a:ext cx="7315200" cy="274320"/>
+            <a:ext cx="9144000" cy="274320"/>
           </a:xfrm>
           <a:prstGeom prst="rect">
             <a:avLst/>
@@ -3676,7 +3676,7 @@
                 <a:ea typeface="Calibri" pitchFamily="34" charset="-122"/>
                 <a:cs typeface="Calibri" pitchFamily="34" charset="-120"/>
               </a:rPr>
-              <a:t>ET-DAO · Accelerating AI+ Transition</a:t>
+              <a:t>ET-DAO · Accelerating AI+ Transition   ·   Option B · AI-Native Defense Mesh</a:t>
             </a:r>
             <a:endParaRPr lang="en-US" sz="900" dirty="0"/>
           </a:p>
@@ -4444,7 +4444,7 @@
         <p:spPr>
           <a:xfrm>
             <a:off x="457200" y="6473952"/>
-            <a:ext cx="7315200" cy="274320"/>
+            <a:ext cx="9144000" cy="274320"/>
           </a:xfrm>
           <a:prstGeom prst="rect">
             <a:avLst/>
@@ -4468,7 +4468,7 @@
                 <a:ea typeface="Calibri" pitchFamily="34" charset="-122"/>
                 <a:cs typeface="Calibri" pitchFamily="34" charset="-120"/>
               </a:rPr>
-              <a:t>ET-DAO · Accelerating AI+ Transition</a:t>
+              <a:t>ET-DAO · Accelerating AI+ Transition   ·   Option B · AI-Native Defense Mesh</a:t>
             </a:r>
             <a:endParaRPr lang="en-US" sz="900" dirty="0"/>
           </a:p>
@@ -5244,7 +5244,7 @@
         <p:spPr>
           <a:xfrm>
             <a:off x="457200" y="6473952"/>
-            <a:ext cx="7315200" cy="274320"/>
+            <a:ext cx="9144000" cy="274320"/>
           </a:xfrm>
           <a:prstGeom prst="rect">
             <a:avLst/>
@@ -5268,7 +5268,7 @@
                 <a:ea typeface="Calibri" pitchFamily="34" charset="-122"/>
                 <a:cs typeface="Calibri" pitchFamily="34" charset="-120"/>
               </a:rPr>
-              <a:t>ET-DAO · Accelerating AI+ Transition</a:t>
+              <a:t>ET-DAO · Accelerating AI+ Transition   ·   Option B · AI-Native Defense Mesh</a:t>
             </a:r>
             <a:endParaRPr lang="en-US" sz="900" dirty="0"/>
           </a:p>
@@ -6116,7 +6116,7 @@
         <p:spPr>
           <a:xfrm>
             <a:off x="457200" y="6473952"/>
-            <a:ext cx="7315200" cy="274320"/>
+            <a:ext cx="9144000" cy="274320"/>
           </a:xfrm>
           <a:prstGeom prst="rect">
             <a:avLst/>
@@ -6140,7 +6140,7 @@
                 <a:ea typeface="Calibri" pitchFamily="34" charset="-122"/>
                 <a:cs typeface="Calibri" pitchFamily="34" charset="-120"/>
               </a:rPr>
-              <a:t>ET-DAO · Accelerating AI+ Transition</a:t>
+              <a:t>ET-DAO · Accelerating AI+ Transition   ·   Option B · AI-Native Defense Mesh</a:t>
             </a:r>
             <a:endParaRPr lang="en-US" sz="900" dirty="0"/>
           </a:p>
@@ -7121,7 +7121,7 @@
         <p:spPr>
           <a:xfrm>
             <a:off x="457200" y="6473952"/>
-            <a:ext cx="7315200" cy="274320"/>
+            <a:ext cx="9144000" cy="274320"/>
           </a:xfrm>
           <a:prstGeom prst="rect">
             <a:avLst/>
@@ -7145,7 +7145,7 @@
                 <a:ea typeface="Calibri" pitchFamily="34" charset="-122"/>
                 <a:cs typeface="Calibri" pitchFamily="34" charset="-120"/>
               </a:rPr>
-              <a:t>ET-DAO · Accelerating AI+ Transition</a:t>
+              <a:t>ET-DAO · Accelerating AI+ Transition   ·   Option B · AI-Native Defense Mesh</a:t>
             </a:r>
             <a:endParaRPr lang="en-US" sz="900" dirty="0"/>
           </a:p>
@@ -8219,7 +8219,7 @@
         <p:spPr>
           <a:xfrm>
             <a:off x="457200" y="6473952"/>
-            <a:ext cx="7315200" cy="274320"/>
+            <a:ext cx="9144000" cy="274320"/>
           </a:xfrm>
           <a:prstGeom prst="rect">
             <a:avLst/>
@@ -8243,7 +8243,7 @@
                 <a:ea typeface="Calibri" pitchFamily="34" charset="-122"/>
                 <a:cs typeface="Calibri" pitchFamily="34" charset="-120"/>
               </a:rPr>
-              <a:t>ET-DAO · Accelerating AI+ Transition</a:t>
+              <a:t>ET-DAO · Accelerating AI+ Transition   ·   Option B · AI-Native Defense Mesh</a:t>
             </a:r>
             <a:endParaRPr lang="en-US" sz="900" dirty="0"/>
           </a:p>
@@ -10127,7 +10127,7 @@
         <p:spPr>
           <a:xfrm>
             <a:off x="457200" y="6473952"/>
-            <a:ext cx="7315200" cy="274320"/>
+            <a:ext cx="9144000" cy="274320"/>
           </a:xfrm>
           <a:prstGeom prst="rect">
             <a:avLst/>
@@ -10151,7 +10151,7 @@
                 <a:ea typeface="Calibri" pitchFamily="34" charset="-122"/>
                 <a:cs typeface="Calibri" pitchFamily="34" charset="-120"/>
               </a:rPr>
-              <a:t>ET-DAO · Accelerating AI+ Transition</a:t>
+              <a:t>ET-DAO · Accelerating AI+ Transition   ·   Option B · AI-Native Defense Mesh</a:t>
             </a:r>
             <a:endParaRPr lang="en-US" sz="900" dirty="0"/>
           </a:p>
@@ -11527,7 +11527,7 @@
         <p:spPr>
           <a:xfrm>
             <a:off x="457200" y="6473952"/>
-            <a:ext cx="7315200" cy="274320"/>
+            <a:ext cx="9144000" cy="274320"/>
           </a:xfrm>
           <a:prstGeom prst="rect">
             <a:avLst/>
@@ -11551,7 +11551,7 @@
                 <a:ea typeface="Calibri" pitchFamily="34" charset="-122"/>
                 <a:cs typeface="Calibri" pitchFamily="34" charset="-120"/>
               </a:rPr>
-              <a:t>ET-DAO · Accelerating AI+ Transition</a:t>
+              <a:t>ET-DAO · Accelerating AI+ Transition   ·   Option B · AI-Native Defense Mesh</a:t>
             </a:r>
             <a:endParaRPr lang="en-US" sz="900" dirty="0"/>
           </a:p>
@@ -12238,7 +12238,7 @@
         <p:spPr>
           <a:xfrm>
             <a:off x="457200" y="6473952"/>
-            <a:ext cx="7315200" cy="274320"/>
+            <a:ext cx="9144000" cy="274320"/>
           </a:xfrm>
           <a:prstGeom prst="rect">
             <a:avLst/>
@@ -12262,7 +12262,7 @@
                 <a:ea typeface="Calibri" pitchFamily="34" charset="-122"/>
                 <a:cs typeface="Calibri" pitchFamily="34" charset="-120"/>
               </a:rPr>
-              <a:t>ET-DAO · Accelerating AI+ Transition</a:t>
+              <a:t>ET-DAO · Accelerating AI+ Transition   ·   Option B · AI-Native Defense Mesh</a:t>
             </a:r>
             <a:endParaRPr lang="en-US" sz="900" dirty="0"/>
           </a:p>
@@ -14924,7 +14924,7 @@
         <p:spPr>
           <a:xfrm>
             <a:off x="457200" y="6473952"/>
-            <a:ext cx="7315200" cy="274320"/>
+            <a:ext cx="9144000" cy="274320"/>
           </a:xfrm>
           <a:prstGeom prst="rect">
             <a:avLst/>
@@ -14948,7 +14948,7 @@
                 <a:ea typeface="Calibri" pitchFamily="34" charset="-122"/>
                 <a:cs typeface="Calibri" pitchFamily="34" charset="-120"/>
               </a:rPr>
-              <a:t>ET-DAO · Accelerating AI+ Transition</a:t>
+              <a:t>ET-DAO · Accelerating AI+ Transition   ·   Option B · AI-Native Defense Mesh</a:t>
             </a:r>
             <a:endParaRPr lang="en-US" sz="900" dirty="0"/>
           </a:p>
@@ -15990,7 +15990,7 @@
         <p:spPr>
           <a:xfrm>
             <a:off x="457200" y="6473952"/>
-            <a:ext cx="7315200" cy="274320"/>
+            <a:ext cx="9144000" cy="274320"/>
           </a:xfrm>
           <a:prstGeom prst="rect">
             <a:avLst/>
@@ -16014,7 +16014,7 @@
                 <a:ea typeface="Calibri" pitchFamily="34" charset="-122"/>
                 <a:cs typeface="Calibri" pitchFamily="34" charset="-120"/>
               </a:rPr>
-              <a:t>ET-DAO · Accelerating AI+ Transition</a:t>
+              <a:t>ET-DAO · Accelerating AI+ Transition   ·   Option B · AI-Native Defense Mesh</a:t>
             </a:r>
             <a:endParaRPr lang="en-US" sz="900" dirty="0"/>
           </a:p>
@@ -16762,7 +16762,7 @@
         <p:spPr>
           <a:xfrm>
             <a:off x="457200" y="6473952"/>
-            <a:ext cx="7315200" cy="274320"/>
+            <a:ext cx="9144000" cy="274320"/>
           </a:xfrm>
           <a:prstGeom prst="rect">
             <a:avLst/>
@@ -16786,7 +16786,7 @@
                 <a:ea typeface="Calibri" pitchFamily="34" charset="-122"/>
                 <a:cs typeface="Calibri" pitchFamily="34" charset="-120"/>
               </a:rPr>
-              <a:t>ET-DAO · Accelerating AI+ Transition</a:t>
+              <a:t>ET-DAO · Accelerating AI+ Transition   ·   Option B · AI-Native Defense Mesh</a:t>
             </a:r>
             <a:endParaRPr lang="en-US" sz="900" dirty="0"/>
           </a:p>
